--- a/dataset/guides_final/NET/guide/IT-NET-001_VPN 접속 장애 대응 가이드.pptx
+++ b/dataset/guides_final/NET/guide/IT-NET-001_VPN 접속 장애 대응 가이드.pptx
@@ -3237,7 +3237,7 @@
                 <a:ea typeface="Malgun Gothic"/>
                 <a:cs typeface="Malgun Gothic"/>
               </a:rPr>
-              <a:t>한화시스템 ICT 임직원 IT 안내 · VPN·네트워크</a:t>
+              <a:t>가상 ICT 기업 임직원 IT 안내 · VPN·네트워크</a:t>
             </a:r>
           </a:p>
         </p:txBody>
@@ -3469,7 +3469,7 @@
                 <a:ea typeface="Malgun Gothic"/>
                 <a:cs typeface="Malgun Gothic"/>
               </a:rPr>
-              <a:t>© HANWHA SYSTEMS ICT · IT-NET-001 · 사내 일반</a:t>
+              <a:t>© 가상 ICT 기업 · IT-NET-001 · 사내 일반</a:t>
             </a:r>
           </a:p>
         </p:txBody>
@@ -5583,7 +5583,7 @@
                 <a:ea typeface="Malgun Gothic"/>
                 <a:cs typeface="Malgun Gothic"/>
               </a:rPr>
-              <a:t>© HANWHA SYSTEMS ICT · IT-NET-001 · 사내 일반</a:t>
+              <a:t>© 가상 ICT 기업 · IT-NET-001 · 사내 일반</a:t>
             </a:r>
           </a:p>
         </p:txBody>
@@ -7089,7 +7089,7 @@
                 <a:ea typeface="Malgun Gothic"/>
                 <a:cs typeface="Malgun Gothic"/>
               </a:rPr>
-              <a:t>© HANWHA SYSTEMS ICT · IT-NET-001 · 사내 일반</a:t>
+              <a:t>© 가상 ICT 기업 · IT-NET-001 · 사내 일반</a:t>
             </a:r>
           </a:p>
         </p:txBody>
@@ -9227,7 +9227,7 @@
                 <a:ea typeface="Malgun Gothic"/>
                 <a:cs typeface="Malgun Gothic"/>
               </a:rPr>
-              <a:t>© HANWHA SYSTEMS ICT · IT-NET-001 · 사내 일반</a:t>
+              <a:t>© 가상 ICT 기업 · IT-NET-001 · 사내 일반</a:t>
             </a:r>
           </a:p>
         </p:txBody>
@@ -10846,7 +10846,7 @@
                 <a:ea typeface="Malgun Gothic"/>
                 <a:cs typeface="Malgun Gothic"/>
               </a:rPr>
-              <a:t>© HANWHA SYSTEMS ICT · IT-NET-001 · 사내 일반</a:t>
+              <a:t>© 가상 ICT 기업 · IT-NET-001 · 사내 일반</a:t>
             </a:r>
           </a:p>
         </p:txBody>
@@ -12748,7 +12748,7 @@
                 <a:ea typeface="Malgun Gothic"/>
                 <a:cs typeface="Malgun Gothic"/>
               </a:rPr>
-              <a:t>© HANWHA SYSTEMS ICT · IT-NET-001 · 사내 일반</a:t>
+              <a:t>© 가상 ICT 기업 · IT-NET-001 · 사내 일반</a:t>
             </a:r>
           </a:p>
         </p:txBody>
@@ -14254,7 +14254,7 @@
                 <a:ea typeface="Malgun Gothic"/>
                 <a:cs typeface="Malgun Gothic"/>
               </a:rPr>
-              <a:t>© HANWHA SYSTEMS ICT · IT-NET-001 · 사내 일반</a:t>
+              <a:t>© 가상 ICT 기업 · IT-NET-001 · 사내 일반</a:t>
             </a:r>
           </a:p>
         </p:txBody>
@@ -14502,7 +14502,7 @@
                 <a:ea typeface="Malgun Gothic"/>
                 <a:cs typeface="Malgun Gothic"/>
               </a:rPr>
-              <a:t>© HANWHA SYSTEMS ICT · IT-NET-001 · 사내 일반</a:t>
+              <a:t>© 가상 ICT 기업 · IT-NET-001 · 사내 일반</a:t>
             </a:r>
           </a:p>
         </p:txBody>
@@ -15243,7 +15243,7 @@
                 <a:ea typeface="Malgun Gothic"/>
                 <a:cs typeface="Malgun Gothic"/>
               </a:rPr>
-              <a:t>© HANWHA SYSTEMS ICT · IT-NET-001 · 사내 일반</a:t>
+              <a:t>© 가상 ICT 기업 · IT-NET-001 · 사내 일반</a:t>
             </a:r>
           </a:p>
         </p:txBody>
@@ -15491,7 +15491,7 @@
                 <a:ea typeface="Malgun Gothic"/>
                 <a:cs typeface="Malgun Gothic"/>
               </a:rPr>
-              <a:t>© HANWHA SYSTEMS ICT · IT-NET-001 · 사내 일반</a:t>
+              <a:t>© 가상 ICT 기업 · IT-NET-001 · 사내 일반</a:t>
             </a:r>
           </a:p>
         </p:txBody>
@@ -16150,7 +16150,7 @@
                 <a:ea typeface="Malgun Gothic"/>
                 <a:cs typeface="Malgun Gothic"/>
               </a:rPr>
-              <a:t>© HANWHA SYSTEMS ICT · IT-NET-001 · 사내 일반</a:t>
+              <a:t>© 가상 ICT 기업 · IT-NET-001 · 사내 일반</a:t>
             </a:r>
           </a:p>
         </p:txBody>
@@ -17955,7 +17955,7 @@
                 <a:ea typeface="Malgun Gothic"/>
                 <a:cs typeface="Malgun Gothic"/>
               </a:rPr>
-              <a:t>© HANWHA SYSTEMS ICT · IT-NET-001 · 사내 일반</a:t>
+              <a:t>© 가상 ICT 기업 · IT-NET-001 · 사내 일반</a:t>
             </a:r>
           </a:p>
         </p:txBody>
@@ -18203,7 +18203,7 @@
                 <a:ea typeface="Malgun Gothic"/>
                 <a:cs typeface="Malgun Gothic"/>
               </a:rPr>
-              <a:t>© HANWHA SYSTEMS ICT · IT-NET-001 · 사내 일반</a:t>
+              <a:t>© 가상 ICT 기업 · IT-NET-001 · 사내 일반</a:t>
             </a:r>
           </a:p>
         </p:txBody>
@@ -18715,7 +18715,7 @@
                           <a:ea typeface="Malgun Gothic"/>
                           <a:cs typeface="Malgun Gothic"/>
                         </a:rPr>
-                        <a:t>사내 IT 포털(hanwha-admin) 상단 [챗봇 문의]</a:t>
+                        <a:t>사내 IT 포털 상단 [챗봇 문의]</a:t>
                       </a:r>
                     </a:p>
                   </a:txBody>
@@ -19407,7 +19407,7 @@
                           <a:ea typeface="Malgun Gothic"/>
                           <a:cs typeface="Malgun Gothic"/>
                         </a:rPr>
-                        <a:t>it-helpdesk@hanwha-ict.example</a:t>
+                        <a:t>it-helpdesk@ict.example</a:t>
                       </a:r>
                     </a:p>
                   </a:txBody>
@@ -19706,7 +19706,7 @@
                 <a:ea typeface="Malgun Gothic"/>
                 <a:cs typeface="Malgun Gothic"/>
               </a:rPr>
-              <a:t>© HANWHA SYSTEMS ICT · IT-NET-001 · 사내 일반</a:t>
+              <a:t>© 가상 ICT 기업 · IT-NET-001 · 사내 일반</a:t>
             </a:r>
           </a:p>
         </p:txBody>
@@ -19954,7 +19954,7 @@
                 <a:ea typeface="Malgun Gothic"/>
                 <a:cs typeface="Malgun Gothic"/>
               </a:rPr>
-              <a:t>© HANWHA SYSTEMS ICT · IT-NET-001 · 사내 일반</a:t>
+              <a:t>© 가상 ICT 기업 · IT-NET-001 · 사내 일반</a:t>
             </a:r>
           </a:p>
         </p:txBody>
@@ -22003,7 +22003,7 @@
                 <a:ea typeface="Malgun Gothic"/>
                 <a:cs typeface="Malgun Gothic"/>
               </a:rPr>
-              <a:t>© HANWHA SYSTEMS ICT · IT-NET-001 · 사내 일반</a:t>
+              <a:t>© 가상 ICT 기업 · IT-NET-001 · 사내 일반</a:t>
             </a:r>
           </a:p>
         </p:txBody>
@@ -22980,7 +22980,7 @@
                 <a:ea typeface="Malgun Gothic"/>
                 <a:cs typeface="Malgun Gothic"/>
               </a:rPr>
-              <a:t>© HANWHA SYSTEMS ICT · IT-NET-001 · 사내 일반</a:t>
+              <a:t>© 가상 ICT 기업 · IT-NET-001 · 사내 일반</a:t>
             </a:r>
           </a:p>
         </p:txBody>
@@ -24256,7 +24256,7 @@
                 <a:ea typeface="Malgun Gothic"/>
                 <a:cs typeface="Malgun Gothic"/>
               </a:rPr>
-              <a:t>© HANWHA SYSTEMS ICT · IT-NET-001 · 사내 일반</a:t>
+              <a:t>© 가상 ICT 기업 · IT-NET-001 · 사내 일반</a:t>
             </a:r>
           </a:p>
         </p:txBody>
@@ -24504,7 +24504,7 @@
                 <a:ea typeface="Malgun Gothic"/>
                 <a:cs typeface="Malgun Gothic"/>
               </a:rPr>
-              <a:t>© HANWHA SYSTEMS ICT · IT-NET-001 · 사내 일반</a:t>
+              <a:t>© 가상 ICT 기업 · IT-NET-001 · 사내 일반</a:t>
             </a:r>
           </a:p>
         </p:txBody>
@@ -25296,7 +25296,7 @@
                 <a:ea typeface="Malgun Gothic"/>
                 <a:cs typeface="Malgun Gothic"/>
               </a:rPr>
-              <a:t>© HANWHA SYSTEMS ICT · IT-NET-001 · 사내 일반</a:t>
+              <a:t>© 가상 ICT 기업 · IT-NET-001 · 사내 일반</a:t>
             </a:r>
           </a:p>
         </p:txBody>
@@ -25544,7 +25544,7 @@
                 <a:ea typeface="Malgun Gothic"/>
                 <a:cs typeface="Malgun Gothic"/>
               </a:rPr>
-              <a:t>© HANWHA SYSTEMS ICT · IT-NET-001 · 사내 일반</a:t>
+              <a:t>© 가상 ICT 기업 · IT-NET-001 · 사내 일반</a:t>
             </a:r>
           </a:p>
         </p:txBody>
@@ -26203,7 +26203,7 @@
                 <a:ea typeface="Malgun Gothic"/>
                 <a:cs typeface="Malgun Gothic"/>
               </a:rPr>
-              <a:t>© HANWHA SYSTEMS ICT · IT-NET-001 · 사내 일반</a:t>
+              <a:t>© 가상 ICT 기업 · IT-NET-001 · 사내 일반</a:t>
             </a:r>
           </a:p>
         </p:txBody>
@@ -26451,7 +26451,7 @@
                 <a:ea typeface="Malgun Gothic"/>
                 <a:cs typeface="Malgun Gothic"/>
               </a:rPr>
-              <a:t>© HANWHA SYSTEMS ICT · IT-NET-001 · 사내 일반</a:t>
+              <a:t>© 가상 ICT 기업 · IT-NET-001 · 사내 일반</a:t>
             </a:r>
           </a:p>
         </p:txBody>
@@ -27871,7 +27871,7 @@
                 <a:ea typeface="Malgun Gothic"/>
                 <a:cs typeface="Malgun Gothic"/>
               </a:rPr>
-              <a:t>© HANWHA SYSTEMS ICT · IT-NET-001 · 사내 일반</a:t>
+              <a:t>© 가상 ICT 기업 · IT-NET-001 · 사내 일반</a:t>
             </a:r>
           </a:p>
         </p:txBody>
